--- a/brand/spark-companies-client-proposal.pptx
+++ b/brand/spark-companies-client-proposal.pptx
@@ -113,33 +113,33 @@
   <p:extLst>
     <p:ext uri="{521415D9-36F7-43E2-AB2F-B90AF26B5E84}">
       <p14:sectionLst xmlns:p14="http://schemas.microsoft.com/office/powerpoint/2010/main">
-        <p14:section name="Cover" id="{a54f83a8-58da-9828-ca7b-3a5737e0501a}">
+        <p14:section name="Cover" id="{38fa4fa6-eb51-6cba-0b3a-9bea3d6f86a8}">
           <p14:sldIdLst>
             <p14:sldId id="256"/>
           </p14:sldIdLst>
         </p14:section>
-        <p14:section name="Understanding" id="{352952aa-6e50-8fb9-c0dd-aac51f482f89}">
+        <p14:section name="Understanding" id="{f141f931-1c5b-41f7-43b4-a7f697f02829}">
           <p14:sldIdLst>
             <p14:sldId id="257"/>
             <p14:sldId id="258"/>
           </p14:sldIdLst>
         </p14:section>
-        <p14:section name="Approach" id="{19bce8dc-ced5-037f-e3d1-1b786258b824}">
+        <p14:section name="Approach" id="{d76f3212-5273-ce6b-107f-0573a47ab632}">
           <p14:sldIdLst>
             <p14:sldId id="259"/>
           </p14:sldIdLst>
         </p14:section>
-        <p14:section name="Proof" id="{1f5571e7-fc96-f6fa-4998-933556fdfca5}">
+        <p14:section name="Proof" id="{629e7cae-a097-bb25-18bb-e444b7be9b2e}">
           <p14:sldIdLst>
             <p14:sldId id="260"/>
           </p14:sldIdLst>
         </p14:section>
-        <p14:section name="Commercials" id="{ca954b6e-23b4-9d3b-ea07-36debd0ae724}">
+        <p14:section name="Commercials" id="{b6bf8303-a93c-0fbc-d814-85c74734c69c}">
           <p14:sldIdLst>
             <p14:sldId id="261"/>
           </p14:sldIdLst>
         </p14:section>
-        <p14:section name="Close" id="{084085fe-a3e2-aafa-9bab-856be1bd64c2}">
+        <p14:section name="Close" id="{152f1c6b-df16-b0e2-7b28-7ff2061d98e1}">
           <p14:sldIdLst>
             <p14:sldId id="262"/>
           </p14:sldIdLst>
@@ -2725,7 +2725,7 @@
                   <a:srgbClr val="6F6A5D"/>
                 </a:solidFill>
               </a:rPr>
-              <a:t>Say it back in their words. If they do not recognise it, the rest of the deck does not land.</a:t>
+              <a:t>Say it back in their words. If they do not recognize it, the rest of the deck does not land.</a:t>
             </a:r>
             <a:endParaRPr lang="en-US" sz="1250" dirty="0"/>
           </a:p>
